--- a/dist/초3/수학/자연수계산/초3_수학_자연수계산_05_두자리수×한자리수.pptx
+++ b/dist/초3/수학/자연수계산/초3_수학_자연수계산_05_두자리수×한자리수.pptx
@@ -121,13 +121,13 @@
   <p:extLst>
     <p:ext uri="{521415D9-36F7-43E2-AB2F-B90AF26B5E84}">
       <p14:sectionLst xmlns:p14="http://schemas.microsoft.com/office/powerpoint/2010/main">
-        <p14:section name="도입" id="{29f4d1de-4452-e5d2-d0f0-fb44117188ca}">
+        <p14:section name="도입" id="{62b07bb3-1550-04e2-3d97-361d38cb96c1}">
           <p14:sldIdLst>
             <p14:sldId id="256"/>
             <p14:sldId id="257"/>
           </p14:sldIdLst>
         </p14:section>
-        <p14:section name="개념" id="{3935704b-cdca-f28f-9295-a1cb7e104641}">
+        <p14:section name="개념" id="{bb9d2d6d-09d4-4fe4-a11d-cc18e3c17600}">
           <p14:sldIdLst>
             <p14:sldId id="258"/>
             <p14:sldId id="259"/>
@@ -137,31 +137,31 @@
             <p14:sldId id="264"/>
           </p14:sldIdLst>
         </p14:section>
-        <p14:section name="연습" id="{3c580f7e-9311-da2e-cedd-ad4151f0629a}">
+        <p14:section name="연습" id="{2edd850c-3621-aff8-1565-3c7620c5b440}">
           <p14:sldIdLst>
             <p14:sldId id="262"/>
             <p14:sldId id="265"/>
           </p14:sldIdLst>
         </p14:section>
-        <p14:section name="개념" id="{e9b2f79d-8d1d-c49c-07c4-aa7a2f2c6f8e}">
+        <p14:section name="개념" id="{0e8d45e3-544e-b913-bf2d-e2cac99f8e6a}">
           <p14:sldIdLst/>
         </p14:section>
-        <p14:section name="연습" id="{9871223f-eb90-799c-c4a3-0a9927467ddd}">
+        <p14:section name="연습" id="{3d15cd42-d7d9-18e0-7691-adaeef91a46c}">
           <p14:sldIdLst/>
         </p14:section>
-        <p14:section name="확인" id="{dd73a003-ec78-bbff-5f24-9f0e48277976}">
+        <p14:section name="확인" id="{50fec1df-64b1-6e05-e4bf-110c05c90bd3}">
           <p14:sldIdLst>
             <p14:sldId id="266"/>
             <p14:sldId id="267"/>
             <p14:sldId id="268"/>
           </p14:sldIdLst>
         </p14:section>
-        <p14:section name="정리" id="{76420891-1f7b-92e9-f511-e60d412e90de}">
+        <p14:section name="정리" id="{78e04611-ab3b-c939-810a-edb6d1db6170}">
           <p14:sldIdLst>
             <p14:sldId id="269"/>
           </p14:sldIdLst>
         </p14:section>
-        <p14:section name="보충" id="{073506a7-a000-3ae5-ea19-1c47008c2ac4}">
+        <p14:section name="보충" id="{b5fad1c0-1267-6204-cf29-ff2d412adeea}">
           <p14:sldIdLst>
             <p14:sldId id="270"/>
           </p14:sldIdLst>
@@ -3136,7 +3136,7 @@
           </p:nvPr>
         </p:nvGraphicFramePr>
         <p:xfrm>
-          <a:off x="8001000" y="883920"/>
+          <a:off x="8001000" y="922020"/>
           <a:ext cx="3291840" cy="914400"/>
         </p:xfrm>
         <a:graphic>
@@ -3148,7 +3148,7 @@
                 <a:gridCol w="1097280"/>
                 <a:gridCol w="1097280"/>
               </a:tblGrid>
-              <a:tr h="609600">
+              <a:tr h="590550">
                 <a:tc>
                   <a:txBody>
                     <a:bodyPr/>
@@ -3343,7 +3343,7 @@
                   </a:tcPr>
                 </a:tc>
               </a:tr>
-              <a:tr h="609600">
+              <a:tr h="590550">
                 <a:tc>
                   <a:txBody>
                     <a:bodyPr/>
@@ -3538,7 +3538,7 @@
                   </a:tcPr>
                 </a:tc>
               </a:tr>
-              <a:tr h="609600">
+              <a:tr h="590550">
                 <a:tc>
                   <a:txBody>
                     <a:bodyPr/>
@@ -3733,7 +3733,7 @@
                   </a:tcPr>
                 </a:tc>
               </a:tr>
-              <a:tr h="609600">
+              <a:tr h="590550">
                 <a:tc>
                   <a:txBody>
                     <a:bodyPr/>
@@ -12607,7 +12607,7 @@
           </p:nvPr>
         </p:nvGraphicFramePr>
         <p:xfrm>
-          <a:off x="8093629" y="2103120"/>
+          <a:off x="8093629" y="2030730"/>
           <a:ext cx="3017520" cy="914400"/>
         </p:xfrm>
         <a:graphic>
@@ -12619,7 +12619,7 @@
                 <a:gridCol w="1005840"/>
                 <a:gridCol w="1005840"/>
               </a:tblGrid>
-              <a:tr h="487680">
+              <a:tr h="511810">
                 <a:tc>
                   <a:txBody>
                     <a:bodyPr/>
@@ -12628,7 +12628,7 @@
                       <a:pPr eaLnBrk="0" algn="ctr" indent="0" marL="0">
                         <a:buNone/>
                       </a:pPr>
-                      <a:endParaRPr lang="en-US" sz="2400" dirty="0">
+                      <a:endParaRPr lang="en-US" sz="2600" dirty="0">
                         <a:latin typeface="맑은 고딕" charset="0"/>
                         <a:ea typeface="맑은 고딕" charset="0"/>
                         <a:cs typeface="맑은 고딕" charset="0"/>
@@ -12686,7 +12686,7 @@
                         <a:buNone/>
                       </a:pPr>
                       <a:r>
-                        <a:rPr lang="en-US" sz="2400" b="1" dirty="0">
+                        <a:rPr lang="en-US" sz="2600" b="1" dirty="0">
                           <a:solidFill>
                             <a:srgbClr val="1F2937"/>
                           </a:solidFill>
@@ -12696,7 +12696,7 @@
                         </a:rPr>
                         <a:t>십</a:t>
                       </a:r>
-                      <a:endParaRPr lang="en-US" sz="2400" dirty="0">
+                      <a:endParaRPr lang="en-US" sz="2600" dirty="0">
                         <a:latin typeface="맑은 고딕" charset="0"/>
                         <a:ea typeface="맑은 고딕" charset="0"/>
                         <a:cs typeface="맑은 고딕" charset="0"/>
@@ -12754,7 +12754,7 @@
                         <a:buNone/>
                       </a:pPr>
                       <a:r>
-                        <a:rPr lang="en-US" sz="2400" b="1" dirty="0">
+                        <a:rPr lang="en-US" sz="2600" b="1" dirty="0">
                           <a:solidFill>
                             <a:srgbClr val="1F2937"/>
                           </a:solidFill>
@@ -12764,7 +12764,7 @@
                         </a:rPr>
                         <a:t>일</a:t>
                       </a:r>
-                      <a:endParaRPr lang="en-US" sz="2400" dirty="0">
+                      <a:endParaRPr lang="en-US" sz="2600" dirty="0">
                         <a:latin typeface="맑은 고딕" charset="0"/>
                         <a:ea typeface="맑은 고딕" charset="0"/>
                         <a:cs typeface="맑은 고딕" charset="0"/>
@@ -12814,7 +12814,7 @@
                   </a:tcPr>
                 </a:tc>
               </a:tr>
-              <a:tr h="487680">
+              <a:tr h="511810">
                 <a:tc>
                   <a:txBody>
                     <a:bodyPr/>
@@ -12823,7 +12823,7 @@
                       <a:pPr eaLnBrk="0" algn="ctr" indent="0" marL="0">
                         <a:buNone/>
                       </a:pPr>
-                      <a:endParaRPr lang="en-US" sz="2400" dirty="0">
+                      <a:endParaRPr lang="en-US" sz="2600" dirty="0">
                         <a:latin typeface="맑은 고딕" charset="0"/>
                         <a:ea typeface="맑은 고딕" charset="0"/>
                         <a:cs typeface="맑은 고딕" charset="0"/>
@@ -12881,7 +12881,7 @@
                         <a:buNone/>
                       </a:pPr>
                       <a:r>
-                        <a:rPr lang="en-US" sz="2400" dirty="0">
+                        <a:rPr lang="en-US" sz="2600" dirty="0">
                           <a:solidFill>
                             <a:srgbClr val="1F2937"/>
                           </a:solidFill>
@@ -12891,7 +12891,7 @@
                         </a:rPr>
                         <a:t>2</a:t>
                       </a:r>
-                      <a:endParaRPr lang="en-US" sz="2400" dirty="0">
+                      <a:endParaRPr lang="en-US" sz="2600" dirty="0">
                         <a:latin typeface="맑은 고딕" charset="0"/>
                         <a:ea typeface="맑은 고딕" charset="0"/>
                         <a:cs typeface="맑은 고딕" charset="0"/>
@@ -12949,7 +12949,7 @@
                         <a:buNone/>
                       </a:pPr>
                       <a:r>
-                        <a:rPr lang="en-US" sz="2400" dirty="0">
+                        <a:rPr lang="en-US" sz="2600" dirty="0">
                           <a:solidFill>
                             <a:srgbClr val="1F2937"/>
                           </a:solidFill>
@@ -12959,7 +12959,7 @@
                         </a:rPr>
                         <a:t>6</a:t>
                       </a:r>
-                      <a:endParaRPr lang="en-US" sz="2400" dirty="0">
+                      <a:endParaRPr lang="en-US" sz="2600" dirty="0">
                         <a:latin typeface="맑은 고딕" charset="0"/>
                         <a:ea typeface="맑은 고딕" charset="0"/>
                         <a:cs typeface="맑은 고딕" charset="0"/>
@@ -13009,7 +13009,7 @@
                   </a:tcPr>
                 </a:tc>
               </a:tr>
-              <a:tr h="487680">
+              <a:tr h="511810">
                 <a:tc>
                   <a:txBody>
                     <a:bodyPr/>
@@ -13019,7 +13019,7 @@
                         <a:buNone/>
                       </a:pPr>
                       <a:r>
-                        <a:rPr lang="en-US" sz="2400" dirty="0">
+                        <a:rPr lang="en-US" sz="2600" dirty="0">
                           <a:solidFill>
                             <a:srgbClr val="1F2937"/>
                           </a:solidFill>
@@ -13029,7 +13029,7 @@
                         </a:rPr>
                         <a:t>×</a:t>
                       </a:r>
-                      <a:endParaRPr lang="en-US" sz="2400" dirty="0">
+                      <a:endParaRPr lang="en-US" sz="2600" dirty="0">
                         <a:latin typeface="맑은 고딕" charset="0"/>
                         <a:ea typeface="맑은 고딕" charset="0"/>
                         <a:cs typeface="맑은 고딕" charset="0"/>
@@ -13086,7 +13086,7 @@
                       <a:pPr eaLnBrk="0" algn="ctr" indent="0" marL="0">
                         <a:buNone/>
                       </a:pPr>
-                      <a:endParaRPr lang="en-US" sz="2400" dirty="0">
+                      <a:endParaRPr lang="en-US" sz="2600" dirty="0">
                         <a:latin typeface="맑은 고딕" charset="0"/>
                         <a:ea typeface="맑은 고딕" charset="0"/>
                         <a:cs typeface="맑은 고딕" charset="0"/>
@@ -13144,7 +13144,7 @@
                         <a:buNone/>
                       </a:pPr>
                       <a:r>
-                        <a:rPr lang="en-US" sz="2400" dirty="0">
+                        <a:rPr lang="en-US" sz="2600" dirty="0">
                           <a:solidFill>
                             <a:srgbClr val="1F2937"/>
                           </a:solidFill>
@@ -13154,7 +13154,7 @@
                         </a:rPr>
                         <a:t>3</a:t>
                       </a:r>
-                      <a:endParaRPr lang="en-US" sz="2400" dirty="0">
+                      <a:endParaRPr lang="en-US" sz="2600" dirty="0">
                         <a:latin typeface="맑은 고딕" charset="0"/>
                         <a:ea typeface="맑은 고딕" charset="0"/>
                         <a:cs typeface="맑은 고딕" charset="0"/>
@@ -13204,7 +13204,7 @@
                   </a:tcPr>
                 </a:tc>
               </a:tr>
-              <a:tr h="487680">
+              <a:tr h="511810">
                 <a:tc>
                   <a:txBody>
                     <a:bodyPr/>
@@ -13213,7 +13213,7 @@
                       <a:pPr eaLnBrk="0" algn="ctr" indent="0" marL="0">
                         <a:buNone/>
                       </a:pPr>
-                      <a:endParaRPr lang="en-US" sz="2400" dirty="0">
+                      <a:endParaRPr lang="en-US" sz="2600" dirty="0">
                         <a:latin typeface="맑은 고딕" charset="0"/>
                         <a:ea typeface="맑은 고딕" charset="0"/>
                         <a:cs typeface="맑은 고딕" charset="0"/>
@@ -13271,7 +13271,7 @@
                         <a:buNone/>
                       </a:pPr>
                       <a:r>
-                        <a:rPr lang="en-US" sz="2400" dirty="0">
+                        <a:rPr lang="en-US" sz="2600" dirty="0">
                           <a:solidFill>
                             <a:srgbClr val="1F2937"/>
                           </a:solidFill>
@@ -13281,7 +13281,7 @@
                         </a:rPr>
                         <a:t>1</a:t>
                       </a:r>
-                      <a:endParaRPr lang="en-US" sz="2400" dirty="0">
+                      <a:endParaRPr lang="en-US" sz="2600" dirty="0">
                         <a:latin typeface="맑은 고딕" charset="0"/>
                         <a:ea typeface="맑은 고딕" charset="0"/>
                         <a:cs typeface="맑은 고딕" charset="0"/>
@@ -13339,7 +13339,7 @@
                         <a:buNone/>
                       </a:pPr>
                       <a:r>
-                        <a:rPr lang="en-US" sz="2400" dirty="0">
+                        <a:rPr lang="en-US" sz="2600" dirty="0">
                           <a:solidFill>
                             <a:srgbClr val="1F2937"/>
                           </a:solidFill>
@@ -13349,7 +13349,7 @@
                         </a:rPr>
                         <a:t>8</a:t>
                       </a:r>
-                      <a:endParaRPr lang="en-US" sz="2400" dirty="0">
+                      <a:endParaRPr lang="en-US" sz="2600" dirty="0">
                         <a:latin typeface="맑은 고딕" charset="0"/>
                         <a:ea typeface="맑은 고딕" charset="0"/>
                         <a:cs typeface="맑은 고딕" charset="0"/>
@@ -13399,7 +13399,7 @@
                   </a:tcPr>
                 </a:tc>
               </a:tr>
-              <a:tr h="487680">
+              <a:tr h="511810">
                 <a:tc>
                   <a:txBody>
                     <a:bodyPr/>
@@ -13408,7 +13408,7 @@
                       <a:pPr eaLnBrk="0" algn="ctr" indent="0" marL="0">
                         <a:buNone/>
                       </a:pPr>
-                      <a:endParaRPr lang="en-US" sz="2400" dirty="0">
+                      <a:endParaRPr lang="en-US" sz="2600" dirty="0">
                         <a:latin typeface="맑은 고딕" charset="0"/>
                         <a:ea typeface="맑은 고딕" charset="0"/>
                         <a:cs typeface="맑은 고딕" charset="0"/>
@@ -13466,7 +13466,7 @@
                         <a:buNone/>
                       </a:pPr>
                       <a:r>
-                        <a:rPr lang="en-US" sz="2400" dirty="0">
+                        <a:rPr lang="en-US" sz="2600" dirty="0">
                           <a:solidFill>
                             <a:srgbClr val="1F2937"/>
                           </a:solidFill>
@@ -13476,7 +13476,7 @@
                         </a:rPr>
                         <a:t>6</a:t>
                       </a:r>
-                      <a:endParaRPr lang="en-US" sz="2400" dirty="0">
+                      <a:endParaRPr lang="en-US" sz="2600" dirty="0">
                         <a:latin typeface="맑은 고딕" charset="0"/>
                         <a:ea typeface="맑은 고딕" charset="0"/>
                         <a:cs typeface="맑은 고딕" charset="0"/>
@@ -13534,7 +13534,7 @@
                         <a:buNone/>
                       </a:pPr>
                       <a:r>
-                        <a:rPr lang="en-US" sz="2400" dirty="0">
+                        <a:rPr lang="en-US" sz="2600" dirty="0">
                           <a:solidFill>
                             <a:srgbClr val="1F2937"/>
                           </a:solidFill>
@@ -13544,7 +13544,7 @@
                         </a:rPr>
                         <a:t>0</a:t>
                       </a:r>
-                      <a:endParaRPr lang="en-US" sz="2400" dirty="0">
+                      <a:endParaRPr lang="en-US" sz="2600" dirty="0">
                         <a:latin typeface="맑은 고딕" charset="0"/>
                         <a:ea typeface="맑은 고딕" charset="0"/>
                         <a:cs typeface="맑은 고딕" charset="0"/>
@@ -13594,7 +13594,7 @@
                   </a:tcPr>
                 </a:tc>
               </a:tr>
-              <a:tr h="487680">
+              <a:tr h="511810">
                 <a:tc>
                   <a:txBody>
                     <a:bodyPr/>
@@ -13603,7 +13603,7 @@
                       <a:pPr eaLnBrk="0" algn="ctr" indent="0" marL="0">
                         <a:buNone/>
                       </a:pPr>
-                      <a:endParaRPr lang="en-US" sz="2400" dirty="0">
+                      <a:endParaRPr lang="en-US" sz="2600" dirty="0">
                         <a:latin typeface="맑은 고딕" charset="0"/>
                         <a:ea typeface="맑은 고딕" charset="0"/>
                         <a:cs typeface="맑은 고딕" charset="0"/>
@@ -13661,7 +13661,7 @@
                         <a:buNone/>
                       </a:pPr>
                       <a:r>
-                        <a:rPr lang="en-US" sz="2400" dirty="0">
+                        <a:rPr lang="en-US" sz="2600" dirty="0">
                           <a:solidFill>
                             <a:srgbClr val="1F2937"/>
                           </a:solidFill>
@@ -13671,7 +13671,7 @@
                         </a:rPr>
                         <a:t>7</a:t>
                       </a:r>
-                      <a:endParaRPr lang="en-US" sz="2400" dirty="0">
+                      <a:endParaRPr lang="en-US" sz="2600" dirty="0">
                         <a:latin typeface="맑은 고딕" charset="0"/>
                         <a:ea typeface="맑은 고딕" charset="0"/>
                         <a:cs typeface="맑은 고딕" charset="0"/>
@@ -13729,7 +13729,7 @@
                         <a:buNone/>
                       </a:pPr>
                       <a:r>
-                        <a:rPr lang="en-US" sz="2400" dirty="0">
+                        <a:rPr lang="en-US" sz="2600" dirty="0">
                           <a:solidFill>
                             <a:srgbClr val="1F2937"/>
                           </a:solidFill>
@@ -13739,7 +13739,7 @@
                         </a:rPr>
                         <a:t>8</a:t>
                       </a:r>
-                      <a:endParaRPr lang="en-US" sz="2400" dirty="0">
+                      <a:endParaRPr lang="en-US" sz="2600" dirty="0">
                         <a:latin typeface="맑은 고딕" charset="0"/>
                         <a:ea typeface="맑은 고딕" charset="0"/>
                         <a:cs typeface="맑은 고딕" charset="0"/>
@@ -14282,7 +14282,7 @@
           </p:nvPr>
         </p:nvGraphicFramePr>
         <p:xfrm>
-          <a:off x="8063728" y="2042160"/>
+          <a:off x="8063728" y="2089785"/>
           <a:ext cx="3291840" cy="914400"/>
         </p:xfrm>
         <a:graphic>
@@ -14294,7 +14294,7 @@
                 <a:gridCol w="1097280"/>
                 <a:gridCol w="1097280"/>
               </a:tblGrid>
-              <a:tr h="609600">
+              <a:tr h="590550">
                 <a:tc>
                   <a:txBody>
                     <a:bodyPr/>
@@ -14489,7 +14489,7 @@
                   </a:tcPr>
                 </a:tc>
               </a:tr>
-              <a:tr h="609600">
+              <a:tr h="590550">
                 <a:tc>
                   <a:txBody>
                     <a:bodyPr/>
@@ -14673,7 +14673,7 @@
                   </a:tcPr>
                 </a:tc>
               </a:tr>
-              <a:tr h="609600">
+              <a:tr h="590550">
                 <a:tc>
                   <a:txBody>
                     <a:bodyPr/>
@@ -14868,7 +14868,7 @@
                   </a:tcPr>
                 </a:tc>
               </a:tr>
-              <a:tr h="609600">
+              <a:tr h="590550">
                 <a:tc>
                   <a:txBody>
                     <a:bodyPr/>
@@ -15063,7 +15063,7 @@
                   </a:tcPr>
                 </a:tc>
               </a:tr>
-              <a:tr h="609600">
+              <a:tr h="590550">
                 <a:tc>
                   <a:txBody>
                     <a:bodyPr/>
@@ -15798,7 +15798,7 @@
           </p:nvPr>
         </p:nvGraphicFramePr>
         <p:xfrm>
-          <a:off x="7312914" y="2052320"/>
+          <a:off x="7312914" y="2096770"/>
           <a:ext cx="3291840" cy="914400"/>
         </p:xfrm>
         <a:graphic>
@@ -15810,7 +15810,7 @@
                 <a:gridCol w="1097280"/>
                 <a:gridCol w="1097280"/>
               </a:tblGrid>
-              <a:tr h="568960">
+              <a:tr h="551180">
                 <a:tc>
                   <a:txBody>
                     <a:bodyPr/>
@@ -16005,7 +16005,7 @@
                   </a:tcPr>
                 </a:tc>
               </a:tr>
-              <a:tr h="568960">
+              <a:tr h="551180">
                 <a:tc>
                   <a:txBody>
                     <a:bodyPr/>
@@ -16189,7 +16189,7 @@
                   </a:tcPr>
                 </a:tc>
               </a:tr>
-              <a:tr h="568960">
+              <a:tr h="551180">
                 <a:tc>
                   <a:txBody>
                     <a:bodyPr/>
@@ -16384,7 +16384,7 @@
                   </a:tcPr>
                 </a:tc>
               </a:tr>
-              <a:tr h="568960">
+              <a:tr h="551180">
                 <a:tc>
                   <a:txBody>
                     <a:bodyPr/>
@@ -16579,7 +16579,7 @@
                   </a:tcPr>
                 </a:tc>
               </a:tr>
-              <a:tr h="568960">
+              <a:tr h="551180">
                 <a:tc>
                   <a:txBody>
                     <a:bodyPr/>
@@ -17273,7 +17273,7 @@
           </p:nvPr>
         </p:nvGraphicFramePr>
         <p:xfrm>
-          <a:off x="7483450" y="2346960"/>
+          <a:off x="7483450" y="2385060"/>
           <a:ext cx="4023360" cy="914400"/>
         </p:xfrm>
         <a:graphic>
@@ -17286,7 +17286,7 @@
                 <a:gridCol w="1005840"/>
                 <a:gridCol w="1005840"/>
               </a:tblGrid>
-              <a:tr h="609600">
+              <a:tr h="590550">
                 <a:tc>
                   <a:txBody>
                     <a:bodyPr/>
@@ -17549,7 +17549,7 @@
                   </a:tcPr>
                 </a:tc>
               </a:tr>
-              <a:tr h="609600">
+              <a:tr h="590550">
                 <a:tc>
                   <a:txBody>
                     <a:bodyPr/>
@@ -17801,7 +17801,7 @@
                   </a:tcPr>
                 </a:tc>
               </a:tr>
-              <a:tr h="609600">
+              <a:tr h="590550">
                 <a:tc>
                   <a:txBody>
                     <a:bodyPr/>
@@ -18053,7 +18053,7 @@
                   </a:tcPr>
                 </a:tc>
               </a:tr>
-              <a:tr h="609600">
+              <a:tr h="590550">
                 <a:tc>
                   <a:txBody>
                     <a:bodyPr/>
@@ -18809,7 +18809,7 @@
           </p:nvPr>
         </p:nvGraphicFramePr>
         <p:xfrm>
-          <a:off x="7483450" y="2042160"/>
+          <a:off x="7483450" y="2089785"/>
           <a:ext cx="4023360" cy="914400"/>
         </p:xfrm>
         <a:graphic>
@@ -18822,7 +18822,7 @@
                 <a:gridCol w="1005840"/>
                 <a:gridCol w="1005840"/>
               </a:tblGrid>
-              <a:tr h="609600">
+              <a:tr h="590550">
                 <a:tc>
                   <a:txBody>
                     <a:bodyPr/>
@@ -19085,7 +19085,7 @@
                   </a:tcPr>
                 </a:tc>
               </a:tr>
-              <a:tr h="609600">
+              <a:tr h="590550">
                 <a:tc>
                   <a:txBody>
                     <a:bodyPr/>
@@ -19326,7 +19326,7 @@
                   </a:tcPr>
                 </a:tc>
               </a:tr>
-              <a:tr h="609600">
+              <a:tr h="590550">
                 <a:tc>
                   <a:txBody>
                     <a:bodyPr/>
@@ -19578,7 +19578,7 @@
                   </a:tcPr>
                 </a:tc>
               </a:tr>
-              <a:tr h="609600">
+              <a:tr h="590550">
                 <a:tc>
                   <a:txBody>
                     <a:bodyPr/>
@@ -19830,7 +19830,7 @@
                   </a:tcPr>
                 </a:tc>
               </a:tr>
-              <a:tr h="609600">
+              <a:tr h="590550">
                 <a:tc>
                   <a:txBody>
                     <a:bodyPr/>
